--- a/Day15-Testing-and-Data-Engineering-Intro/Day15_Deck_Testing_and_Data_Engineering_Intro.pptx
+++ b/Day15-Testing-and-Data-Engineering-Intro/Day15_Deck_Testing_and_Data_Engineering_Intro.pptx
@@ -6467,13 +6467,13 @@
           <a:noFill/>
         </p:spPr>
         <p:txBody>
-          <a:bodyPr wrap="square" lIns="0" rIns="0" tIns="0" bIns="0" anchor="t">
-            <a:spAutoFit/>
-          </a:bodyPr>
-          <a:lstStyle/>
-          <a:p>
-            <a:r>
-              <a:rPr sz="1323" b="0" i="0">
+          <a:bodyPr wrap="none" lIns="0" rIns="0" tIns="0" bIns="0" anchor="t">
+            <a:spAutoFit/>
+          </a:bodyPr>
+          <a:lstStyle/>
+          <a:p>
+            <a:r>
+              <a:rPr sz="1164" b="0" i="0">
                 <a:solidFill>
                   <a:srgbClr val="EAF7F5"/>
                 </a:solidFill>
@@ -6484,7 +6484,7 @@
           </a:p>
           <a:p>
             <a:r>
-              <a:rPr sz="1323" b="0" i="0">
+              <a:rPr sz="1164" b="0" i="0">
                 <a:solidFill>
                   <a:srgbClr val="EAF7F5"/>
                 </a:solidFill>
@@ -6495,7 +6495,7 @@
           </a:p>
           <a:p>
             <a:r>
-              <a:rPr sz="1323" b="0" i="0">
+              <a:rPr sz="1164" b="0" i="0">
                 <a:solidFill>
                   <a:srgbClr val="EAF7F5"/>
                 </a:solidFill>
@@ -6506,7 +6506,7 @@
           </a:p>
           <a:p>
             <a:r>
-              <a:rPr sz="1323" b="0" i="0">
+              <a:rPr sz="1164" b="0" i="0">
                 <a:solidFill>
                   <a:srgbClr val="EAF7F5"/>
                 </a:solidFill>
@@ -6517,7 +6517,7 @@
           </a:p>
           <a:p>
             <a:r>
-              <a:rPr sz="1323" b="0" i="0">
+              <a:rPr sz="1164" b="0" i="0">
                 <a:solidFill>
                   <a:srgbClr val="EAF7F5"/>
                 </a:solidFill>
@@ -7394,13 +7394,13 @@
           <a:noFill/>
         </p:spPr>
         <p:txBody>
-          <a:bodyPr wrap="square" lIns="0" rIns="0" tIns="0" bIns="0" anchor="t">
-            <a:spAutoFit/>
-          </a:bodyPr>
-          <a:lstStyle/>
-          <a:p>
-            <a:r>
-              <a:rPr sz="1062" b="0" i="0">
+          <a:bodyPr wrap="none" lIns="0" rIns="0" tIns="0" bIns="0" anchor="t">
+            <a:spAutoFit/>
+          </a:bodyPr>
+          <a:lstStyle/>
+          <a:p>
+            <a:r>
+              <a:rPr sz="935" b="0" i="0">
                 <a:solidFill>
                   <a:srgbClr val="EAF7F5"/>
                 </a:solidFill>
@@ -7411,7 +7411,7 @@
           </a:p>
           <a:p>
             <a:r>
-              <a:rPr sz="1062" b="0" i="0">
+              <a:rPr sz="935" b="0" i="0">
                 <a:solidFill>
                   <a:srgbClr val="EAF7F5"/>
                 </a:solidFill>
@@ -7422,7 +7422,7 @@
           </a:p>
           <a:p>
             <a:r>
-              <a:rPr sz="1062" b="0" i="0">
+              <a:rPr sz="935" b="0" i="0">
                 <a:solidFill>
                   <a:srgbClr val="EAF7F5"/>
                 </a:solidFill>
@@ -7433,7 +7433,7 @@
           </a:p>
           <a:p>
             <a:r>
-              <a:rPr sz="1062" b="0" i="0">
+              <a:rPr sz="935" b="0" i="0">
                 <a:solidFill>
                   <a:srgbClr val="EAF7F5"/>
                 </a:solidFill>
@@ -7444,7 +7444,7 @@
           </a:p>
           <a:p>
             <a:r>
-              <a:rPr sz="1062" b="0" i="0">
+              <a:rPr sz="935" b="0" i="0">
                 <a:solidFill>
                   <a:srgbClr val="EAF7F5"/>
                 </a:solidFill>
@@ -7455,7 +7455,7 @@
           </a:p>
           <a:p>
             <a:r>
-              <a:rPr sz="1062" b="0" i="0">
+              <a:rPr sz="935" b="0" i="0">
                 <a:solidFill>
                   <a:srgbClr val="EAF7F5"/>
                 </a:solidFill>
@@ -7466,7 +7466,7 @@
           </a:p>
           <a:p>
             <a:r>
-              <a:rPr sz="1062" b="0" i="0">
+              <a:rPr sz="935" b="0" i="0">
                 <a:solidFill>
                   <a:srgbClr val="EAF7F5"/>
                 </a:solidFill>
@@ -7477,7 +7477,7 @@
           </a:p>
           <a:p>
             <a:r>
-              <a:rPr sz="1062" b="0" i="0">
+              <a:rPr sz="935" b="0" i="0">
                 <a:solidFill>
                   <a:srgbClr val="EAF7F5"/>
                 </a:solidFill>
@@ -7488,7 +7488,7 @@
           </a:p>
           <a:p>
             <a:r>
-              <a:rPr sz="1062" b="0" i="0">
+              <a:rPr sz="935" b="0" i="0">
                 <a:solidFill>
                   <a:srgbClr val="EAF7F5"/>
                 </a:solidFill>
@@ -7499,7 +7499,7 @@
           </a:p>
           <a:p>
             <a:r>
-              <a:rPr sz="1062" b="0" i="0">
+              <a:rPr sz="935" b="0" i="0">
                 <a:solidFill>
                   <a:srgbClr val="EAF7F5"/>
                 </a:solidFill>
@@ -7510,7 +7510,7 @@
           </a:p>
           <a:p>
             <a:r>
-              <a:rPr sz="1062" b="0" i="0">
+              <a:rPr sz="935" b="0" i="0">
                 <a:solidFill>
                   <a:srgbClr val="EAF7F5"/>
                 </a:solidFill>
@@ -7521,7 +7521,7 @@
           </a:p>
           <a:p>
             <a:r>
-              <a:rPr sz="1062" b="0" i="0">
+              <a:rPr sz="935" b="0" i="0">
                 <a:solidFill>
                   <a:srgbClr val="EAF7F5"/>
                 </a:solidFill>
@@ -7532,7 +7532,7 @@
           </a:p>
           <a:p>
             <a:r>
-              <a:rPr sz="1062" b="0" i="0">
+              <a:rPr sz="935" b="0" i="0">
                 <a:solidFill>
                   <a:srgbClr val="EAF7F5"/>
                 </a:solidFill>
@@ -11517,13 +11517,13 @@
           <a:noFill/>
         </p:spPr>
         <p:txBody>
-          <a:bodyPr wrap="square" lIns="0" rIns="0" tIns="0" bIns="0" anchor="t">
-            <a:spAutoFit/>
-          </a:bodyPr>
-          <a:lstStyle/>
-          <a:p>
-            <a:r>
-              <a:rPr sz="1000" b="0" i="0">
+          <a:bodyPr wrap="none" lIns="0" rIns="0" tIns="0" bIns="0" anchor="t">
+            <a:spAutoFit/>
+          </a:bodyPr>
+          <a:lstStyle/>
+          <a:p>
+            <a:r>
+              <a:rPr sz="880" b="0" i="0">
                 <a:solidFill>
                   <a:srgbClr val="EAF7F5"/>
                 </a:solidFill>
@@ -11534,7 +11534,7 @@
           </a:p>
           <a:p>
             <a:r>
-              <a:rPr sz="1000" b="0" i="0">
+              <a:rPr sz="880" b="0" i="0">
                 <a:solidFill>
                   <a:srgbClr val="EAF7F5"/>
                 </a:solidFill>
@@ -11545,7 +11545,7 @@
           </a:p>
           <a:p>
             <a:r>
-              <a:rPr sz="1000" b="0" i="0">
+              <a:rPr sz="880" b="0" i="0">
                 <a:solidFill>
                   <a:srgbClr val="EAF7F5"/>
                 </a:solidFill>
@@ -11556,7 +11556,7 @@
           </a:p>
           <a:p>
             <a:r>
-              <a:rPr sz="1000" b="0" i="0">
+              <a:rPr sz="880" b="0" i="0">
                 <a:solidFill>
                   <a:srgbClr val="EAF7F5"/>
                 </a:solidFill>
@@ -11567,7 +11567,7 @@
           </a:p>
           <a:p>
             <a:r>
-              <a:rPr sz="1000" b="0" i="0">
+              <a:rPr sz="880" b="0" i="0">
                 <a:solidFill>
                   <a:srgbClr val="EAF7F5"/>
                 </a:solidFill>
@@ -11578,7 +11578,7 @@
           </a:p>
           <a:p>
             <a:r>
-              <a:rPr sz="1000" b="0" i="0">
+              <a:rPr sz="880" b="0" i="0">
                 <a:solidFill>
                   <a:srgbClr val="EAF7F5"/>
                 </a:solidFill>
@@ -11589,7 +11589,7 @@
           </a:p>
           <a:p>
             <a:r>
-              <a:rPr sz="1000" b="0" i="0">
+              <a:rPr sz="880" b="0" i="0">
                 <a:solidFill>
                   <a:srgbClr val="EAF7F5"/>
                 </a:solidFill>
@@ -11600,7 +11600,7 @@
           </a:p>
           <a:p>
             <a:r>
-              <a:rPr sz="1000" b="0" i="0">
+              <a:rPr sz="880" b="0" i="0">
                 <a:solidFill>
                   <a:srgbClr val="EAF7F5"/>
                 </a:solidFill>
@@ -11611,7 +11611,7 @@
           </a:p>
           <a:p>
             <a:r>
-              <a:rPr sz="1000" b="0" i="0">
+              <a:rPr sz="880" b="0" i="0">
                 <a:solidFill>
                   <a:srgbClr val="EAF7F5"/>
                 </a:solidFill>
@@ -11622,7 +11622,7 @@
           </a:p>
           <a:p>
             <a:r>
-              <a:rPr sz="1000" b="0" i="0">
+              <a:rPr sz="880" b="0" i="0">
                 <a:solidFill>
                   <a:srgbClr val="EAF7F5"/>
                 </a:solidFill>
@@ -11633,7 +11633,7 @@
           </a:p>
           <a:p>
             <a:r>
-              <a:rPr sz="1000" b="0" i="0">
+              <a:rPr sz="880" b="0" i="0">
                 <a:solidFill>
                   <a:srgbClr val="EAF7F5"/>
                 </a:solidFill>
@@ -11644,7 +11644,7 @@
           </a:p>
           <a:p>
             <a:r>
-              <a:rPr sz="1000" b="0" i="0">
+              <a:rPr sz="880" b="0" i="0">
                 <a:solidFill>
                   <a:srgbClr val="EAF7F5"/>
                 </a:solidFill>
@@ -11655,7 +11655,7 @@
           </a:p>
           <a:p>
             <a:r>
-              <a:rPr sz="1000" b="0" i="0">
+              <a:rPr sz="880" b="0" i="0">
                 <a:solidFill>
                   <a:srgbClr val="EAF7F5"/>
                 </a:solidFill>
@@ -11666,7 +11666,7 @@
           </a:p>
           <a:p>
             <a:r>
-              <a:rPr sz="1000" b="0" i="0">
+              <a:rPr sz="880" b="0" i="0">
                 <a:solidFill>
                   <a:srgbClr val="EAF7F5"/>
                 </a:solidFill>
@@ -11677,7 +11677,7 @@
           </a:p>
           <a:p>
             <a:r>
-              <a:rPr sz="1000" b="0" i="0">
+              <a:rPr sz="880" b="0" i="0">
                 <a:solidFill>
                   <a:srgbClr val="EAF7F5"/>
                 </a:solidFill>
@@ -11688,7 +11688,7 @@
           </a:p>
           <a:p>
             <a:r>
-              <a:rPr sz="1000" b="0" i="0">
+              <a:rPr sz="880" b="0" i="0">
                 <a:solidFill>
                   <a:srgbClr val="EAF7F5"/>
                 </a:solidFill>
@@ -13527,13 +13527,13 @@
           <a:noFill/>
         </p:spPr>
         <p:txBody>
-          <a:bodyPr wrap="square" lIns="0" rIns="0" tIns="0" bIns="0" anchor="t">
-            <a:spAutoFit/>
-          </a:bodyPr>
-          <a:lstStyle/>
-          <a:p>
-            <a:r>
-              <a:rPr sz="864" b="0" i="0">
+          <a:bodyPr wrap="none" lIns="0" rIns="0" tIns="0" bIns="0" anchor="t">
+            <a:spAutoFit/>
+          </a:bodyPr>
+          <a:lstStyle/>
+          <a:p>
+            <a:r>
+              <a:rPr sz="760" b="0" i="0">
                 <a:solidFill>
                   <a:srgbClr val="EAF7F5"/>
                 </a:solidFill>
@@ -13544,7 +13544,7 @@
           </a:p>
           <a:p>
             <a:r>
-              <a:rPr sz="864" b="0" i="0">
+              <a:rPr sz="760" b="0" i="0">
                 <a:solidFill>
                   <a:srgbClr val="EAF7F5"/>
                 </a:solidFill>
@@ -13555,7 +13555,7 @@
           </a:p>
           <a:p>
             <a:r>
-              <a:rPr sz="864" b="0" i="0">
+              <a:rPr sz="760" b="0" i="0">
                 <a:solidFill>
                   <a:srgbClr val="EAF7F5"/>
                 </a:solidFill>
@@ -13566,7 +13566,7 @@
           </a:p>
           <a:p>
             <a:r>
-              <a:rPr sz="864" b="0" i="0">
+              <a:rPr sz="760" b="0" i="0">
                 <a:solidFill>
                   <a:srgbClr val="EAF7F5"/>
                 </a:solidFill>
@@ -13577,7 +13577,7 @@
           </a:p>
           <a:p>
             <a:r>
-              <a:rPr sz="864" b="0" i="0">
+              <a:rPr sz="760" b="0" i="0">
                 <a:solidFill>
                   <a:srgbClr val="EAF7F5"/>
                 </a:solidFill>
@@ -13588,7 +13588,7 @@
           </a:p>
           <a:p>
             <a:r>
-              <a:rPr sz="864" b="0" i="0">
+              <a:rPr sz="760" b="0" i="0">
                 <a:solidFill>
                   <a:srgbClr val="EAF7F5"/>
                 </a:solidFill>
@@ -13599,7 +13599,7 @@
           </a:p>
           <a:p>
             <a:r>
-              <a:rPr sz="864" b="0" i="0">
+              <a:rPr sz="760" b="0" i="0">
                 <a:solidFill>
                   <a:srgbClr val="EAF7F5"/>
                 </a:solidFill>
@@ -13610,7 +13610,7 @@
           </a:p>
           <a:p>
             <a:r>
-              <a:rPr sz="864" b="0" i="0">
+              <a:rPr sz="760" b="0" i="0">
                 <a:solidFill>
                   <a:srgbClr val="EAF7F5"/>
                 </a:solidFill>
@@ -13621,7 +13621,7 @@
           </a:p>
           <a:p>
             <a:r>
-              <a:rPr sz="864" b="0" i="0">
+              <a:rPr sz="760" b="0" i="0">
                 <a:solidFill>
                   <a:srgbClr val="EAF7F5"/>
                 </a:solidFill>
@@ -13632,7 +13632,7 @@
           </a:p>
           <a:p>
             <a:r>
-              <a:rPr sz="864" b="0" i="0">
+              <a:rPr sz="760" b="0" i="0">
                 <a:solidFill>
                   <a:srgbClr val="EAF7F5"/>
                 </a:solidFill>
@@ -13643,7 +13643,7 @@
           </a:p>
           <a:p>
             <a:r>
-              <a:rPr sz="864" b="0" i="0">
+              <a:rPr sz="760" b="0" i="0">
                 <a:solidFill>
                   <a:srgbClr val="EAF7F5"/>
                 </a:solidFill>
@@ -13654,7 +13654,7 @@
           </a:p>
           <a:p>
             <a:r>
-              <a:rPr sz="864" b="0" i="0">
+              <a:rPr sz="760" b="0" i="0">
                 <a:solidFill>
                   <a:srgbClr val="EAF7F5"/>
                 </a:solidFill>
@@ -13665,7 +13665,7 @@
           </a:p>
           <a:p>
             <a:r>
-              <a:rPr sz="864" b="0" i="0">
+              <a:rPr sz="760" b="0" i="0">
                 <a:solidFill>
                   <a:srgbClr val="EAF7F5"/>
                 </a:solidFill>
@@ -19315,13 +19315,13 @@
           <a:noFill/>
         </p:spPr>
         <p:txBody>
-          <a:bodyPr wrap="square" lIns="0" rIns="0" tIns="0" bIns="0" anchor="t">
-            <a:spAutoFit/>
-          </a:bodyPr>
-          <a:lstStyle/>
-          <a:p>
-            <a:r>
-              <a:rPr sz="1108" b="0" i="0">
+          <a:bodyPr wrap="none" lIns="0" rIns="0" tIns="0" bIns="0" anchor="t">
+            <a:spAutoFit/>
+          </a:bodyPr>
+          <a:lstStyle/>
+          <a:p>
+            <a:r>
+              <a:rPr sz="975" b="0" i="0">
                 <a:solidFill>
                   <a:srgbClr val="EAF7F5"/>
                 </a:solidFill>
@@ -19332,7 +19332,7 @@
           </a:p>
           <a:p>
             <a:r>
-              <a:rPr sz="1108" b="0" i="0">
+              <a:rPr sz="975" b="0" i="0">
                 <a:solidFill>
                   <a:srgbClr val="EAF7F5"/>
                 </a:solidFill>
@@ -19343,7 +19343,7 @@
           </a:p>
           <a:p>
             <a:r>
-              <a:rPr sz="1108" b="0" i="0">
+              <a:rPr sz="975" b="0" i="0">
                 <a:solidFill>
                   <a:srgbClr val="EAF7F5"/>
                 </a:solidFill>
@@ -19354,7 +19354,7 @@
           </a:p>
           <a:p>
             <a:r>
-              <a:rPr sz="1108" b="0" i="0">
+              <a:rPr sz="975" b="0" i="0">
                 <a:solidFill>
                   <a:srgbClr val="EAF7F5"/>
                 </a:solidFill>
@@ -19365,7 +19365,7 @@
           </a:p>
           <a:p>
             <a:r>
-              <a:rPr sz="1108" b="0" i="0">
+              <a:rPr sz="975" b="0" i="0">
                 <a:solidFill>
                   <a:srgbClr val="EAF7F5"/>
                 </a:solidFill>
@@ -19376,7 +19376,7 @@
           </a:p>
           <a:p>
             <a:r>
-              <a:rPr sz="1108" b="0" i="0">
+              <a:rPr sz="975" b="0" i="0">
                 <a:solidFill>
                   <a:srgbClr val="EAF7F5"/>
                 </a:solidFill>
@@ -19387,7 +19387,7 @@
           </a:p>
           <a:p>
             <a:r>
-              <a:rPr sz="1108" b="0" i="0">
+              <a:rPr sz="975" b="0" i="0">
                 <a:solidFill>
                   <a:srgbClr val="EAF7F5"/>
                 </a:solidFill>
@@ -19398,7 +19398,7 @@
           </a:p>
           <a:p>
             <a:r>
-              <a:rPr sz="1108" b="0" i="0">
+              <a:rPr sz="975" b="0" i="0">
                 <a:solidFill>
                   <a:srgbClr val="EAF7F5"/>
                 </a:solidFill>
@@ -19409,7 +19409,7 @@
           </a:p>
           <a:p>
             <a:r>
-              <a:rPr sz="1108" b="0" i="0">
+              <a:rPr sz="975" b="0" i="0">
                 <a:solidFill>
                   <a:srgbClr val="EAF7F5"/>
                 </a:solidFill>
@@ -19420,7 +19420,7 @@
           </a:p>
           <a:p>
             <a:r>
-              <a:rPr sz="1108" b="0" i="0">
+              <a:rPr sz="975" b="0" i="0">
                 <a:solidFill>
                   <a:srgbClr val="EAF7F5"/>
                 </a:solidFill>
@@ -19431,7 +19431,7 @@
           </a:p>
           <a:p>
             <a:r>
-              <a:rPr sz="1108" b="0" i="0">
+              <a:rPr sz="975" b="0" i="0">
                 <a:solidFill>
                   <a:srgbClr val="EAF7F5"/>
                 </a:solidFill>
@@ -19442,7 +19442,7 @@
           </a:p>
           <a:p>
             <a:r>
-              <a:rPr sz="1108" b="0" i="0">
+              <a:rPr sz="975" b="0" i="0">
                 <a:solidFill>
                   <a:srgbClr val="EAF7F5"/>
                 </a:solidFill>
@@ -19453,7 +19453,7 @@
           </a:p>
           <a:p>
             <a:r>
-              <a:rPr sz="1108" b="0" i="0">
+              <a:rPr sz="975" b="0" i="0">
                 <a:solidFill>
                   <a:srgbClr val="EAF7F5"/>
                 </a:solidFill>
@@ -19464,7 +19464,7 @@
           </a:p>
           <a:p>
             <a:r>
-              <a:rPr sz="1108" b="0" i="0">
+              <a:rPr sz="975" b="0" i="0">
                 <a:solidFill>
                   <a:srgbClr val="EAF7F5"/>
                 </a:solidFill>
@@ -19475,7 +19475,7 @@
           </a:p>
           <a:p>
             <a:r>
-              <a:rPr sz="1108" b="0" i="0">
+              <a:rPr sz="975" b="0" i="0">
                 <a:solidFill>
                   <a:srgbClr val="EAF7F5"/>
                 </a:solidFill>
@@ -19486,7 +19486,7 @@
           </a:p>
           <a:p>
             <a:r>
-              <a:rPr sz="1108" b="0" i="0">
+              <a:rPr sz="975" b="0" i="0">
                 <a:solidFill>
                   <a:srgbClr val="EAF7F5"/>
                 </a:solidFill>
@@ -19774,13 +19774,13 @@
           <a:noFill/>
         </p:spPr>
         <p:txBody>
-          <a:bodyPr wrap="square" lIns="0" rIns="0" tIns="0" bIns="0" anchor="t">
-            <a:spAutoFit/>
-          </a:bodyPr>
-          <a:lstStyle/>
-          <a:p>
-            <a:r>
-              <a:rPr sz="1085" b="0" i="0">
+          <a:bodyPr wrap="none" lIns="0" rIns="0" tIns="0" bIns="0" anchor="t">
+            <a:spAutoFit/>
+          </a:bodyPr>
+          <a:lstStyle/>
+          <a:p>
+            <a:r>
+              <a:rPr sz="954" b="0" i="0">
                 <a:solidFill>
                   <a:srgbClr val="EAF7F5"/>
                 </a:solidFill>
@@ -19791,7 +19791,7 @@
           </a:p>
           <a:p>
             <a:r>
-              <a:rPr sz="1085" b="0" i="0">
+              <a:rPr sz="954" b="0" i="0">
                 <a:solidFill>
                   <a:srgbClr val="EAF7F5"/>
                 </a:solidFill>
@@ -19802,7 +19802,7 @@
           </a:p>
           <a:p>
             <a:r>
-              <a:rPr sz="1085" b="0" i="0">
+              <a:rPr sz="954" b="0" i="0">
                 <a:solidFill>
                   <a:srgbClr val="EAF7F5"/>
                 </a:solidFill>
@@ -19813,7 +19813,7 @@
           </a:p>
           <a:p>
             <a:r>
-              <a:rPr sz="1085" b="0" i="0">
+              <a:rPr sz="954" b="0" i="0">
                 <a:solidFill>
                   <a:srgbClr val="EAF7F5"/>
                 </a:solidFill>
@@ -19824,7 +19824,7 @@
           </a:p>
           <a:p>
             <a:r>
-              <a:rPr sz="1085" b="0" i="0">
+              <a:rPr sz="954" b="0" i="0">
                 <a:solidFill>
                   <a:srgbClr val="EAF7F5"/>
                 </a:solidFill>
@@ -19835,7 +19835,7 @@
           </a:p>
           <a:p>
             <a:r>
-              <a:rPr sz="1085" b="0" i="0">
+              <a:rPr sz="954" b="0" i="0">
                 <a:solidFill>
                   <a:srgbClr val="EAF7F5"/>
                 </a:solidFill>
@@ -19846,7 +19846,7 @@
           </a:p>
           <a:p>
             <a:r>
-              <a:rPr sz="1085" b="0" i="0">
+              <a:rPr sz="954" b="0" i="0">
                 <a:solidFill>
                   <a:srgbClr val="EAF7F5"/>
                 </a:solidFill>
@@ -19857,7 +19857,7 @@
           </a:p>
           <a:p>
             <a:r>
-              <a:rPr sz="1085" b="0" i="0">
+              <a:rPr sz="954" b="0" i="0">
                 <a:solidFill>
                   <a:srgbClr val="EAF7F5"/>
                 </a:solidFill>
@@ -19868,7 +19868,7 @@
           </a:p>
           <a:p>
             <a:r>
-              <a:rPr sz="1085" b="0" i="0">
+              <a:rPr sz="954" b="0" i="0">
                 <a:solidFill>
                   <a:srgbClr val="EAF7F5"/>
                 </a:solidFill>
@@ -19879,7 +19879,7 @@
           </a:p>
           <a:p>
             <a:r>
-              <a:rPr sz="1085" b="0" i="0">
+              <a:rPr sz="954" b="0" i="0">
                 <a:solidFill>
                   <a:srgbClr val="EAF7F5"/>
                 </a:solidFill>
@@ -19890,7 +19890,7 @@
           </a:p>
           <a:p>
             <a:r>
-              <a:rPr sz="1085" b="0" i="0">
+              <a:rPr sz="954" b="0" i="0">
                 <a:solidFill>
                   <a:srgbClr val="EAF7F5"/>
                 </a:solidFill>
@@ -19901,7 +19901,7 @@
           </a:p>
           <a:p>
             <a:r>
-              <a:rPr sz="1085" b="0" i="0">
+              <a:rPr sz="954" b="0" i="0">
                 <a:solidFill>
                   <a:srgbClr val="EAF7F5"/>
                 </a:solidFill>
@@ -19912,7 +19912,7 @@
           </a:p>
           <a:p>
             <a:r>
-              <a:rPr sz="1085" b="0" i="0">
+              <a:rPr sz="954" b="0" i="0">
                 <a:solidFill>
                   <a:srgbClr val="EAF7F5"/>
                 </a:solidFill>
@@ -19923,7 +19923,7 @@
           </a:p>
           <a:p>
             <a:r>
-              <a:rPr sz="1085" b="0" i="0">
+              <a:rPr sz="954" b="0" i="0">
                 <a:solidFill>
                   <a:srgbClr val="EAF7F5"/>
                 </a:solidFill>
@@ -20211,13 +20211,13 @@
           <a:noFill/>
         </p:spPr>
         <p:txBody>
-          <a:bodyPr wrap="square" lIns="0" rIns="0" tIns="0" bIns="0" anchor="t">
-            <a:spAutoFit/>
-          </a:bodyPr>
-          <a:lstStyle/>
-          <a:p>
-            <a:r>
-              <a:rPr sz="980" b="0" i="0">
+          <a:bodyPr wrap="none" lIns="0" rIns="0" tIns="0" bIns="0" anchor="t">
+            <a:spAutoFit/>
+          </a:bodyPr>
+          <a:lstStyle/>
+          <a:p>
+            <a:r>
+              <a:rPr sz="863" b="0" i="0">
                 <a:solidFill>
                   <a:srgbClr val="EAF7F5"/>
                 </a:solidFill>
@@ -20228,7 +20228,7 @@
           </a:p>
           <a:p>
             <a:r>
-              <a:rPr sz="980" b="0" i="0">
+              <a:rPr sz="863" b="0" i="0">
                 <a:solidFill>
                   <a:srgbClr val="EAF7F5"/>
                 </a:solidFill>
@@ -20239,7 +20239,7 @@
           </a:p>
           <a:p>
             <a:r>
-              <a:rPr sz="980" b="0" i="0">
+              <a:rPr sz="863" b="0" i="0">
                 <a:solidFill>
                   <a:srgbClr val="EAF7F5"/>
                 </a:solidFill>
@@ -20250,7 +20250,7 @@
           </a:p>
           <a:p>
             <a:r>
-              <a:rPr sz="980" b="0" i="0">
+              <a:rPr sz="863" b="0" i="0">
                 <a:solidFill>
                   <a:srgbClr val="EAF7F5"/>
                 </a:solidFill>
@@ -20261,7 +20261,7 @@
           </a:p>
           <a:p>
             <a:r>
-              <a:rPr sz="980" b="0" i="0">
+              <a:rPr sz="863" b="0" i="0">
                 <a:solidFill>
                   <a:srgbClr val="EAF7F5"/>
                 </a:solidFill>
@@ -20272,7 +20272,7 @@
           </a:p>
           <a:p>
             <a:r>
-              <a:rPr sz="980" b="0" i="0">
+              <a:rPr sz="863" b="0" i="0">
                 <a:solidFill>
                   <a:srgbClr val="EAF7F5"/>
                 </a:solidFill>
@@ -20283,7 +20283,7 @@
           </a:p>
           <a:p>
             <a:r>
-              <a:rPr sz="980" b="0" i="0">
+              <a:rPr sz="863" b="0" i="0">
                 <a:solidFill>
                   <a:srgbClr val="EAF7F5"/>
                 </a:solidFill>
@@ -20294,7 +20294,7 @@
           </a:p>
           <a:p>
             <a:r>
-              <a:rPr sz="980" b="0" i="0">
+              <a:rPr sz="863" b="0" i="0">
                 <a:solidFill>
                   <a:srgbClr val="EAF7F5"/>
                 </a:solidFill>
@@ -20305,7 +20305,7 @@
           </a:p>
           <a:p>
             <a:r>
-              <a:rPr sz="980" b="0" i="0">
+              <a:rPr sz="863" b="0" i="0">
                 <a:solidFill>
                   <a:srgbClr val="EAF7F5"/>
                 </a:solidFill>
@@ -20316,7 +20316,7 @@
           </a:p>
           <a:p>
             <a:r>
-              <a:rPr sz="980" b="0" i="0">
+              <a:rPr sz="863" b="0" i="0">
                 <a:solidFill>
                   <a:srgbClr val="EAF7F5"/>
                 </a:solidFill>
@@ -20327,7 +20327,7 @@
           </a:p>
           <a:p>
             <a:r>
-              <a:rPr sz="980" b="0" i="0">
+              <a:rPr sz="863" b="0" i="0">
                 <a:solidFill>
                   <a:srgbClr val="EAF7F5"/>
                 </a:solidFill>
@@ -20338,7 +20338,7 @@
           </a:p>
           <a:p>
             <a:r>
-              <a:rPr sz="980" b="0" i="0">
+              <a:rPr sz="863" b="0" i="0">
                 <a:solidFill>
                   <a:srgbClr val="EAF7F5"/>
                 </a:solidFill>
@@ -20349,7 +20349,7 @@
           </a:p>
           <a:p>
             <a:r>
-              <a:rPr sz="980" b="0" i="0">
+              <a:rPr sz="863" b="0" i="0">
                 <a:solidFill>
                   <a:srgbClr val="EAF7F5"/>
                 </a:solidFill>
@@ -20360,7 +20360,7 @@
           </a:p>
           <a:p>
             <a:r>
-              <a:rPr sz="980" b="0" i="0">
+              <a:rPr sz="863" b="0" i="0">
                 <a:solidFill>
                   <a:srgbClr val="EAF7F5"/>
                 </a:solidFill>
@@ -20371,7 +20371,7 @@
           </a:p>
           <a:p>
             <a:r>
-              <a:rPr sz="980" b="0" i="0">
+              <a:rPr sz="863" b="0" i="0">
                 <a:solidFill>
                   <a:srgbClr val="EAF7F5"/>
                 </a:solidFill>
